--- a/Schools_ML_Track/camp_2026/slides/ML/ML15.pptx
+++ b/Schools_ML_Track/camp_2026/slides/ML/ML15.pptx
@@ -128,7 +128,7 @@
   <p:extLst>
     <p:ext uri="{521415D9-36F7-43E2-AB2F-B90AF26B5E84}">
       <p14:sectionLst xmlns:p14="http://schemas.microsoft.com/office/powerpoint/2010/main">
-        <p14:section name="Opening" id="{0069efb0-c942-54ae-5e48-3f7626a9c9b1}">
+        <p14:section name="Opening" id="{98ab91c3-70e8-2b51-d9d7-eb8bcf140bbf}">
           <p14:sldIdLst>
             <p14:sldId id="256"/>
             <p14:sldId id="257"/>
@@ -139,7 +139,7 @@
             <p14:sldId id="262"/>
           </p14:sldIdLst>
         </p14:section>
-        <p14:section name="Block A" id="{14eb78c6-d8ed-d2c2-d6c1-3682c3c015bf}">
+        <p14:section name="Block A" id="{3f2769a0-ab50-3675-c801-bc5da94868f2}">
           <p14:sldIdLst>
             <p14:sldId id="263"/>
             <p14:sldId id="264"/>
@@ -149,15 +149,15 @@
             <p14:sldId id="269"/>
           </p14:sldIdLst>
         </p14:section>
-        <p14:section name="Break" id="{99a3b4ea-6a57-ad02-c8e9-3a945877ed6d}">
+        <p14:section name="Break" id="{7cfa4c67-7d87-ba72-a9eb-5fcefa68c323}">
           <p14:sldIdLst>
             <p14:sldId id="267"/>
           </p14:sldIdLst>
         </p14:section>
-        <p14:section name="Block A" id="{c2c40877-74ab-412b-0195-e84bc26a3046}">
+        <p14:section name="Block A" id="{0dd3beff-a6a5-d639-631f-e9dfaeecac7c}">
           <p14:sldIdLst/>
         </p14:section>
-        <p14:section name="Block B" id="{8b857fd2-cdf4-65a1-8453-7c8fb665b967}">
+        <p14:section name="Block B" id="{85a690d1-8f36-5c9d-742c-b94fab9240bd}">
           <p14:sldIdLst>
             <p14:sldId id="270"/>
             <p14:sldId id="271"/>
@@ -166,7 +166,7 @@
             <p14:sldId id="274"/>
           </p14:sldIdLst>
         </p14:section>
-        <p14:section name="Make and close" id="{4486cf21-4f37-231d-fcc1-a53bf59dc508}">
+        <p14:section name="Make and close" id="{972f59a5-731a-2eec-8d69-f4243204ca0a}">
           <p14:sldIdLst>
             <p14:sldId id="275"/>
             <p14:sldId id="276"/>

--- a/Schools_ML_Track/camp_2026/slides/ML/ML15.pptx
+++ b/Schools_ML_Track/camp_2026/slides/ML/ML15.pptx
@@ -128,7 +128,7 @@
   <p:extLst>
     <p:ext uri="{521415D9-36F7-43E2-AB2F-B90AF26B5E84}">
       <p14:sectionLst xmlns:p14="http://schemas.microsoft.com/office/powerpoint/2010/main">
-        <p14:section name="Opening" id="{98ab91c3-70e8-2b51-d9d7-eb8bcf140bbf}">
+        <p14:section name="Opening" id="{5fdfe2c4-f5bd-3ac6-5431-d3164e746350}">
           <p14:sldIdLst>
             <p14:sldId id="256"/>
             <p14:sldId id="257"/>
@@ -139,7 +139,7 @@
             <p14:sldId id="262"/>
           </p14:sldIdLst>
         </p14:section>
-        <p14:section name="Block A" id="{3f2769a0-ab50-3675-c801-bc5da94868f2}">
+        <p14:section name="Block A" id="{015fca8f-b6be-888d-6315-f3eae0cb24ef}">
           <p14:sldIdLst>
             <p14:sldId id="263"/>
             <p14:sldId id="264"/>
@@ -149,15 +149,15 @@
             <p14:sldId id="269"/>
           </p14:sldIdLst>
         </p14:section>
-        <p14:section name="Break" id="{7cfa4c67-7d87-ba72-a9eb-5fcefa68c323}">
+        <p14:section name="Break" id="{b9e77a2e-4fea-8f6f-cb2f-19f774107cf5}">
           <p14:sldIdLst>
             <p14:sldId id="267"/>
           </p14:sldIdLst>
         </p14:section>
-        <p14:section name="Block A" id="{0dd3beff-a6a5-d639-631f-e9dfaeecac7c}">
+        <p14:section name="Block A" id="{35e192cd-3630-229e-d57a-9cdfeaf3338c}">
           <p14:sldIdLst/>
         </p14:section>
-        <p14:section name="Block B" id="{85a690d1-8f36-5c9d-742c-b94fab9240bd}">
+        <p14:section name="Block B" id="{743dd44a-22b1-91ec-55f5-170fcc540906}">
           <p14:sldIdLst>
             <p14:sldId id="270"/>
             <p14:sldId id="271"/>
@@ -166,7 +166,7 @@
             <p14:sldId id="274"/>
           </p14:sldIdLst>
         </p14:section>
-        <p14:section name="Make and close" id="{972f59a5-731a-2eec-8d69-f4243204ca0a}">
+        <p14:section name="Make and close" id="{880417f8-4e4e-66e6-c6a6-925be5f46e77}">
           <p14:sldIdLst>
             <p14:sldId id="275"/>
             <p14:sldId id="276"/>
@@ -3197,7 +3197,24 @@
                 <a:ea typeface="Lato" pitchFamily="34" charset="-122"/>
                 <a:cs typeface="Lato" pitchFamily="34" charset="-120"/>
               </a:rPr>
-              <a:t>A complete regression experiment</a:t>
+              <a:t>A complete regression</a:t>
+            </a:r>
+            <a:endParaRPr lang="en-US" sz="5600" dirty="0"/>
+          </a:p>
+          <a:p>
+            <a:pPr algn="l" indent="0" marL="0">
+              <a:buNone/>
+            </a:pPr>
+            <a:r>
+              <a:rPr lang="en-US" sz="5600" b="1" dirty="0">
+                <a:solidFill>
+                  <a:srgbClr val="FFFFFF"/>
+                </a:solidFill>
+                <a:latin typeface="Lato" pitchFamily="34" charset="0"/>
+                <a:ea typeface="Lato" pitchFamily="34" charset="-122"/>
+                <a:cs typeface="Lato" pitchFamily="34" charset="-120"/>
+              </a:rPr>
+              <a:t>experiment</a:t>
             </a:r>
             <a:endParaRPr lang="en-US" sz="5600" dirty="0"/>
           </a:p>
@@ -4426,11 +4443,11 @@
         <p:spPr>
           <a:xfrm>
             <a:off x="640080" y="1645920"/>
-            <a:ext cx="7223760" cy="4368292"/>
+            <a:ext cx="10881360" cy="2816352"/>
           </a:xfrm>
           <a:prstGeom prst="roundRect">
             <a:avLst>
-              <a:gd name="adj" fmla="val 1675"/>
+              <a:gd name="adj" fmla="val 2597"/>
             </a:avLst>
           </a:prstGeom>
           <a:solidFill>
@@ -4448,7 +4465,7 @@
         <p:spPr>
           <a:xfrm>
             <a:off x="841248" y="1847088"/>
-            <a:ext cx="6821424" cy="3965956"/>
+            <a:ext cx="10479024" cy="2414016"/>
           </a:xfrm>
           <a:prstGeom prst="rect">
             <a:avLst/>
@@ -4462,12 +4479,12 @@
           <a:p>
             <a:pPr algn="l" indent="0" marL="0">
               <a:lnSpc>
-                <a:spcPts val="2210"/>
-              </a:lnSpc>
-              <a:buNone/>
-            </a:pPr>
-            <a:r>
-              <a:rPr lang="en-US" sz="1700" b="1" dirty="0">
+                <a:spcPts val="2340"/>
+              </a:lnSpc>
+              <a:buNone/>
+            </a:pPr>
+            <a:r>
+              <a:rPr lang="en-US" sz="1800" b="1" dirty="0">
                 <a:solidFill>
                   <a:srgbClr val="FFFFFF"/>
                 </a:solidFill>
@@ -4479,12 +4496,12 @@
             </a:r>
             <a:pPr algn="l" indent="0" marL="0">
               <a:lnSpc>
-                <a:spcPts val="2210"/>
-              </a:lnSpc>
-              <a:buNone/>
-            </a:pPr>
-            <a:r>
-              <a:rPr lang="en-US" sz="1700" dirty="0">
+                <a:spcPts val="2340"/>
+              </a:lnSpc>
+              <a:buNone/>
+            </a:pPr>
+            <a:r>
+              <a:rPr lang="en-US" sz="1800" dirty="0">
                 <a:solidFill>
                   <a:srgbClr val="FFFFFF"/>
                 </a:solidFill>
@@ -4496,12 +4513,12 @@
             </a:r>
             <a:pPr algn="l" indent="0" marL="0">
               <a:lnSpc>
-                <a:spcPts val="2210"/>
-              </a:lnSpc>
-              <a:buNone/>
-            </a:pPr>
-            <a:r>
-              <a:rPr lang="en-US" sz="1700" b="1" dirty="0">
+                <a:spcPts val="2340"/>
+              </a:lnSpc>
+              <a:buNone/>
+            </a:pPr>
+            <a:r>
+              <a:rPr lang="en-US" sz="1800" b="1" dirty="0">
                 <a:solidFill>
                   <a:srgbClr val="FFFFFF"/>
                 </a:solidFill>
@@ -4513,12 +4530,12 @@
             </a:r>
             <a:pPr algn="l" indent="0" marL="0">
               <a:lnSpc>
-                <a:spcPts val="2210"/>
-              </a:lnSpc>
-              <a:buNone/>
-            </a:pPr>
-            <a:r>
-              <a:rPr lang="en-US" sz="1700" dirty="0">
+                <a:spcPts val="2340"/>
+              </a:lnSpc>
+              <a:buNone/>
+            </a:pPr>
+            <a:r>
+              <a:rPr lang="en-US" sz="1800" dirty="0">
                 <a:solidFill>
                   <a:srgbClr val="FFFFFF"/>
                 </a:solidFill>
@@ -4528,17 +4545,17 @@
               </a:rPr>
               <a:t> DummyRegressor</a:t>
             </a:r>
-            <a:endParaRPr lang="en-US" sz="1700" dirty="0"/>
-          </a:p>
-          <a:p>
-            <a:pPr algn="l" indent="0" marL="0">
-              <a:lnSpc>
-                <a:spcPts val="2210"/>
-              </a:lnSpc>
-              <a:buNone/>
-            </a:pPr>
-            <a:r>
-              <a:rPr lang="en-US" sz="1700" b="1" dirty="0">
+            <a:endParaRPr lang="en-US" sz="1800" dirty="0"/>
+          </a:p>
+          <a:p>
+            <a:pPr algn="l" indent="0" marL="0">
+              <a:lnSpc>
+                <a:spcPts val="2340"/>
+              </a:lnSpc>
+              <a:buNone/>
+            </a:pPr>
+            <a:r>
+              <a:rPr lang="en-US" sz="1800" b="1" dirty="0">
                 <a:solidFill>
                   <a:srgbClr val="FFFFFF"/>
                 </a:solidFill>
@@ -4550,12 +4567,12 @@
             </a:r>
             <a:pPr algn="l" indent="0" marL="0">
               <a:lnSpc>
-                <a:spcPts val="2210"/>
-              </a:lnSpc>
-              <a:buNone/>
-            </a:pPr>
-            <a:r>
-              <a:rPr lang="en-US" sz="1700" dirty="0">
+                <a:spcPts val="2340"/>
+              </a:lnSpc>
+              <a:buNone/>
+            </a:pPr>
+            <a:r>
+              <a:rPr lang="en-US" sz="1800" dirty="0">
                 <a:solidFill>
                   <a:srgbClr val="FFFFFF"/>
                 </a:solidFill>
@@ -4567,12 +4584,12 @@
             </a:r>
             <a:pPr algn="l" indent="0" marL="0">
               <a:lnSpc>
-                <a:spcPts val="2210"/>
-              </a:lnSpc>
-              <a:buNone/>
-            </a:pPr>
-            <a:r>
-              <a:rPr lang="en-US" sz="1700" b="1" dirty="0">
+                <a:spcPts val="2340"/>
+              </a:lnSpc>
+              <a:buNone/>
+            </a:pPr>
+            <a:r>
+              <a:rPr lang="en-US" sz="1800" b="1" dirty="0">
                 <a:solidFill>
                   <a:srgbClr val="FFFFFF"/>
                 </a:solidFill>
@@ -4584,12 +4601,12 @@
             </a:r>
             <a:pPr algn="l" indent="0" marL="0">
               <a:lnSpc>
-                <a:spcPts val="2210"/>
-              </a:lnSpc>
-              <a:buNone/>
-            </a:pPr>
-            <a:r>
-              <a:rPr lang="en-US" sz="1700" dirty="0">
+                <a:spcPts val="2340"/>
+              </a:lnSpc>
+              <a:buNone/>
+            </a:pPr>
+            <a:r>
+              <a:rPr lang="en-US" sz="1800" dirty="0">
                 <a:solidFill>
                   <a:srgbClr val="FFFFFF"/>
                 </a:solidFill>
@@ -4599,17 +4616,17 @@
               </a:rPr>
               <a:t> LinearRegression</a:t>
             </a:r>
-            <a:endParaRPr lang="en-US" sz="1700" dirty="0"/>
-          </a:p>
-          <a:p>
-            <a:pPr algn="l" indent="0" marL="0">
-              <a:lnSpc>
-                <a:spcPts val="2210"/>
-              </a:lnSpc>
-              <a:buNone/>
-            </a:pPr>
-            <a:r>
-              <a:rPr lang="en-US" sz="1700" b="1" dirty="0">
+            <a:endParaRPr lang="en-US" sz="1800" dirty="0"/>
+          </a:p>
+          <a:p>
+            <a:pPr algn="l" indent="0" marL="0">
+              <a:lnSpc>
+                <a:spcPts val="2340"/>
+              </a:lnSpc>
+              <a:buNone/>
+            </a:pPr>
+            <a:r>
+              <a:rPr lang="en-US" sz="1800" b="1" dirty="0">
                 <a:solidFill>
                   <a:srgbClr val="FFFFFF"/>
                 </a:solidFill>
@@ -4621,12 +4638,12 @@
             </a:r>
             <a:pPr algn="l" indent="0" marL="0">
               <a:lnSpc>
-                <a:spcPts val="2210"/>
-              </a:lnSpc>
-              <a:buNone/>
-            </a:pPr>
-            <a:r>
-              <a:rPr lang="en-US" sz="1700" dirty="0">
+                <a:spcPts val="2340"/>
+              </a:lnSpc>
+              <a:buNone/>
+            </a:pPr>
+            <a:r>
+              <a:rPr lang="en-US" sz="1800" dirty="0">
                 <a:solidFill>
                   <a:srgbClr val="FFFFFF"/>
                 </a:solidFill>
@@ -4638,12 +4655,12 @@
             </a:r>
             <a:pPr algn="l" indent="0" marL="0">
               <a:lnSpc>
-                <a:spcPts val="2210"/>
-              </a:lnSpc>
-              <a:buNone/>
-            </a:pPr>
-            <a:r>
-              <a:rPr lang="en-US" sz="1700" b="1" dirty="0">
+                <a:spcPts val="2340"/>
+              </a:lnSpc>
+              <a:buNone/>
+            </a:pPr>
+            <a:r>
+              <a:rPr lang="en-US" sz="1800" b="1" dirty="0">
                 <a:solidFill>
                   <a:srgbClr val="FFFFFF"/>
                 </a:solidFill>
@@ -4655,12 +4672,12 @@
             </a:r>
             <a:pPr algn="l" indent="0" marL="0">
               <a:lnSpc>
-                <a:spcPts val="2210"/>
-              </a:lnSpc>
-              <a:buNone/>
-            </a:pPr>
-            <a:r>
-              <a:rPr lang="en-US" sz="1700" dirty="0">
+                <a:spcPts val="2340"/>
+              </a:lnSpc>
+              <a:buNone/>
+            </a:pPr>
+            <a:r>
+              <a:rPr lang="en-US" sz="1800" dirty="0">
                 <a:solidFill>
                   <a:srgbClr val="FFFFFF"/>
                 </a:solidFill>
@@ -4670,17 +4687,17 @@
               </a:rPr>
               <a:t> mean_absolute_error</a:t>
             </a:r>
-            <a:endParaRPr lang="en-US" sz="1700" dirty="0"/>
-          </a:p>
-          <a:p>
-            <a:pPr algn="l" indent="0" marL="0">
-              <a:lnSpc>
-                <a:spcPts val="2210"/>
-              </a:lnSpc>
-              <a:buNone/>
-            </a:pPr>
-            <a:r>
-              <a:rPr lang="en-US" sz="1700" dirty="0">
+            <a:endParaRPr lang="en-US" sz="1800" dirty="0"/>
+          </a:p>
+          <a:p>
+            <a:pPr algn="l" indent="0" marL="0">
+              <a:lnSpc>
+                <a:spcPts val="2340"/>
+              </a:lnSpc>
+              <a:buNone/>
+            </a:pPr>
+            <a:r>
+              <a:rPr lang="en-US" sz="1800" dirty="0">
                 <a:solidFill>
                   <a:srgbClr val="FFFFFF"/>
                 </a:solidFill>
@@ -4692,12 +4709,12 @@
             </a:r>
             <a:pPr algn="l" indent="0" marL="0">
               <a:lnSpc>
-                <a:spcPts val="2210"/>
-              </a:lnSpc>
-              <a:buNone/>
-            </a:pPr>
-            <a:r>
-              <a:rPr lang="en-US" sz="1700" dirty="0">
+                <a:spcPts val="2340"/>
+              </a:lnSpc>
+              <a:buNone/>
+            </a:pPr>
+            <a:r>
+              <a:rPr lang="en-US" sz="1800" dirty="0">
                 <a:solidFill>
                   <a:srgbClr val="E0BE36"/>
                 </a:solidFill>
@@ -4709,12 +4726,12 @@
             </a:r>
             <a:pPr algn="l" indent="0" marL="0">
               <a:lnSpc>
-                <a:spcPts val="2210"/>
-              </a:lnSpc>
-              <a:buNone/>
-            </a:pPr>
-            <a:r>
-              <a:rPr lang="en-US" sz="1700" dirty="0">
+                <a:spcPts val="2340"/>
+              </a:lnSpc>
+              <a:buNone/>
+            </a:pPr>
+            <a:r>
+              <a:rPr lang="en-US" sz="1800" dirty="0">
                 <a:solidFill>
                   <a:srgbClr val="FFFFFF"/>
                 </a:solidFill>
@@ -4722,19 +4739,19 @@
                 <a:ea typeface="Courier New" pitchFamily="34" charset="-122"/>
                 <a:cs typeface="Courier New" pitchFamily="34" charset="-120"/>
               </a:rPr>
-              <a:t>).fit(</a:t>
-            </a:r>
-            <a:endParaRPr lang="en-US" sz="1700" dirty="0"/>
-          </a:p>
-          <a:p>
-            <a:pPr algn="l" indent="0" marL="0">
-              <a:lnSpc>
-                <a:spcPts val="2210"/>
-              </a:lnSpc>
-              <a:buNone/>
-            </a:pPr>
-            <a:r>
-              <a:rPr lang="en-US" sz="1700" dirty="0">
+              <a:t>).fit(X_train, y_train)</a:t>
+            </a:r>
+            <a:endParaRPr lang="en-US" sz="1800" dirty="0"/>
+          </a:p>
+          <a:p>
+            <a:pPr algn="l" indent="0" marL="0">
+              <a:lnSpc>
+                <a:spcPts val="2340"/>
+              </a:lnSpc>
+              <a:buNone/>
+            </a:pPr>
+            <a:r>
+              <a:rPr lang="en-US" sz="1800" dirty="0">
                 <a:solidFill>
                   <a:srgbClr val="FFFFFF"/>
                 </a:solidFill>
@@ -4742,19 +4759,19 @@
                 <a:ea typeface="Courier New" pitchFamily="34" charset="-122"/>
                 <a:cs typeface="Courier New" pitchFamily="34" charset="-120"/>
               </a:rPr>
-              <a:t>    X_train, y_train</a:t>
-            </a:r>
-            <a:endParaRPr lang="en-US" sz="1700" dirty="0"/>
-          </a:p>
-          <a:p>
-            <a:pPr algn="l" indent="0" marL="0">
-              <a:lnSpc>
-                <a:spcPts val="2210"/>
-              </a:lnSpc>
-              <a:buNone/>
-            </a:pPr>
-            <a:r>
-              <a:rPr lang="en-US" sz="1700" dirty="0">
+              <a:t>model = LinearRegression().fit(X_train, y_train)</a:t>
+            </a:r>
+            <a:endParaRPr lang="en-US" sz="1800" dirty="0"/>
+          </a:p>
+          <a:p>
+            <a:pPr algn="l" indent="0" marL="0">
+              <a:lnSpc>
+                <a:spcPts val="2340"/>
+              </a:lnSpc>
+              <a:buNone/>
+            </a:pPr>
+            <a:r>
+              <a:rPr lang="en-US" sz="1800" dirty="0">
                 <a:solidFill>
                   <a:srgbClr val="FFFFFF"/>
                 </a:solidFill>
@@ -4762,19 +4779,19 @@
                 <a:ea typeface="Courier New" pitchFamily="34" charset="-122"/>
                 <a:cs typeface="Courier New" pitchFamily="34" charset="-120"/>
               </a:rPr>
-              <a:t>)</a:t>
-            </a:r>
-            <a:endParaRPr lang="en-US" sz="1700" dirty="0"/>
-          </a:p>
-          <a:p>
-            <a:pPr algn="l" indent="0" marL="0">
-              <a:lnSpc>
-                <a:spcPts val="2210"/>
-              </a:lnSpc>
-              <a:buNone/>
-            </a:pPr>
-            <a:r>
-              <a:rPr lang="en-US" sz="1700" dirty="0">
+              <a:t>baseline_mae = mean_absolute_error(y_test, baseline.predict(X_test))</a:t>
+            </a:r>
+            <a:endParaRPr lang="en-US" sz="1800" dirty="0"/>
+          </a:p>
+          <a:p>
+            <a:pPr algn="l" indent="0" marL="0">
+              <a:lnSpc>
+                <a:spcPts val="2340"/>
+              </a:lnSpc>
+              <a:buNone/>
+            </a:pPr>
+            <a:r>
+              <a:rPr lang="en-US" sz="1800" dirty="0">
                 <a:solidFill>
                   <a:srgbClr val="FFFFFF"/>
                 </a:solidFill>
@@ -4782,19 +4799,19 @@
                 <a:ea typeface="Courier New" pitchFamily="34" charset="-122"/>
                 <a:cs typeface="Courier New" pitchFamily="34" charset="-120"/>
               </a:rPr>
-              <a:t>model = LinearRegression().fit(X_train, y_train)</a:t>
-            </a:r>
-            <a:endParaRPr lang="en-US" sz="1700" dirty="0"/>
-          </a:p>
-          <a:p>
-            <a:pPr algn="l" indent="0" marL="0">
-              <a:lnSpc>
-                <a:spcPts val="2210"/>
-              </a:lnSpc>
-              <a:buNone/>
-            </a:pPr>
-            <a:r>
-              <a:rPr lang="en-US" sz="1700" dirty="0">
+              <a:t>model_mae = mean_absolute_error(y_test, model.predict(X_test))</a:t>
+            </a:r>
+            <a:endParaRPr lang="en-US" sz="1800" dirty="0"/>
+          </a:p>
+          <a:p>
+            <a:pPr algn="l" indent="0" marL="0">
+              <a:lnSpc>
+                <a:spcPts val="2340"/>
+              </a:lnSpc>
+              <a:buNone/>
+            </a:pPr>
+            <a:r>
+              <a:rPr lang="en-US" sz="1800" dirty="0">
                 <a:solidFill>
                   <a:srgbClr val="FFFFFF"/>
                 </a:solidFill>
@@ -4802,129 +4819,9 @@
                 <a:ea typeface="Courier New" pitchFamily="34" charset="-122"/>
                 <a:cs typeface="Courier New" pitchFamily="34" charset="-120"/>
               </a:rPr>
-              <a:t>baseline_mae = mean_absolute_error(</a:t>
-            </a:r>
-            <a:endParaRPr lang="en-US" sz="1700" dirty="0"/>
-          </a:p>
-          <a:p>
-            <a:pPr algn="l" indent="0" marL="0">
-              <a:lnSpc>
-                <a:spcPts val="2210"/>
-              </a:lnSpc>
-              <a:buNone/>
-            </a:pPr>
-            <a:r>
-              <a:rPr lang="en-US" sz="1700" dirty="0">
-                <a:solidFill>
-                  <a:srgbClr val="FFFFFF"/>
-                </a:solidFill>
-                <a:latin typeface="Courier New" pitchFamily="34" charset="0"/>
-                <a:ea typeface="Courier New" pitchFamily="34" charset="-122"/>
-                <a:cs typeface="Courier New" pitchFamily="34" charset="-120"/>
-              </a:rPr>
-              <a:t>    y_test, baseline.predict(X_test)</a:t>
-            </a:r>
-            <a:endParaRPr lang="en-US" sz="1700" dirty="0"/>
-          </a:p>
-          <a:p>
-            <a:pPr algn="l" indent="0" marL="0">
-              <a:lnSpc>
-                <a:spcPts val="2210"/>
-              </a:lnSpc>
-              <a:buNone/>
-            </a:pPr>
-            <a:r>
-              <a:rPr lang="en-US" sz="1700" dirty="0">
-                <a:solidFill>
-                  <a:srgbClr val="FFFFFF"/>
-                </a:solidFill>
-                <a:latin typeface="Courier New" pitchFamily="34" charset="0"/>
-                <a:ea typeface="Courier New" pitchFamily="34" charset="-122"/>
-                <a:cs typeface="Courier New" pitchFamily="34" charset="-120"/>
-              </a:rPr>
-              <a:t>)</a:t>
-            </a:r>
-            <a:endParaRPr lang="en-US" sz="1700" dirty="0"/>
-          </a:p>
-          <a:p>
-            <a:pPr algn="l" indent="0" marL="0">
-              <a:lnSpc>
-                <a:spcPts val="2210"/>
-              </a:lnSpc>
-              <a:buNone/>
-            </a:pPr>
-            <a:r>
-              <a:rPr lang="en-US" sz="1700" dirty="0">
-                <a:solidFill>
-                  <a:srgbClr val="FFFFFF"/>
-                </a:solidFill>
-                <a:latin typeface="Courier New" pitchFamily="34" charset="0"/>
-                <a:ea typeface="Courier New" pitchFamily="34" charset="-122"/>
-                <a:cs typeface="Courier New" pitchFamily="34" charset="-120"/>
-              </a:rPr>
-              <a:t>model_mae = mean_absolute_error(</a:t>
-            </a:r>
-            <a:endParaRPr lang="en-US" sz="1700" dirty="0"/>
-          </a:p>
-          <a:p>
-            <a:pPr algn="l" indent="0" marL="0">
-              <a:lnSpc>
-                <a:spcPts val="2210"/>
-              </a:lnSpc>
-              <a:buNone/>
-            </a:pPr>
-            <a:r>
-              <a:rPr lang="en-US" sz="1700" dirty="0">
-                <a:solidFill>
-                  <a:srgbClr val="FFFFFF"/>
-                </a:solidFill>
-                <a:latin typeface="Courier New" pitchFamily="34" charset="0"/>
-                <a:ea typeface="Courier New" pitchFamily="34" charset="-122"/>
-                <a:cs typeface="Courier New" pitchFamily="34" charset="-120"/>
-              </a:rPr>
-              <a:t>    y_test, model.predict(X_test)</a:t>
-            </a:r>
-            <a:endParaRPr lang="en-US" sz="1700" dirty="0"/>
-          </a:p>
-          <a:p>
-            <a:pPr algn="l" indent="0" marL="0">
-              <a:lnSpc>
-                <a:spcPts val="2210"/>
-              </a:lnSpc>
-              <a:buNone/>
-            </a:pPr>
-            <a:r>
-              <a:rPr lang="en-US" sz="1700" dirty="0">
-                <a:solidFill>
-                  <a:srgbClr val="FFFFFF"/>
-                </a:solidFill>
-                <a:latin typeface="Courier New" pitchFamily="34" charset="0"/>
-                <a:ea typeface="Courier New" pitchFamily="34" charset="-122"/>
-                <a:cs typeface="Courier New" pitchFamily="34" charset="-120"/>
-              </a:rPr>
-              <a:t>)</a:t>
-            </a:r>
-            <a:endParaRPr lang="en-US" sz="1700" dirty="0"/>
-          </a:p>
-          <a:p>
-            <a:pPr algn="l" indent="0" marL="0">
-              <a:lnSpc>
-                <a:spcPts val="2210"/>
-              </a:lnSpc>
-              <a:buNone/>
-            </a:pPr>
-            <a:r>
-              <a:rPr lang="en-US" sz="1700" dirty="0">
-                <a:solidFill>
-                  <a:srgbClr val="FFFFFF"/>
-                </a:solidFill>
-                <a:latin typeface="Courier New" pitchFamily="34" charset="0"/>
-                <a:ea typeface="Courier New" pitchFamily="34" charset="-122"/>
-                <a:cs typeface="Courier New" pitchFamily="34" charset="-120"/>
-              </a:rPr>
               <a:t>print(round(baseline_mae), round(model_mae))</a:t>
             </a:r>
-            <a:endParaRPr lang="en-US" sz="1700" dirty="0"/>
+            <a:endParaRPr lang="en-US" sz="1800" dirty="0"/>
           </a:p>
         </p:txBody>
       </p:sp>
@@ -4936,8 +4833,8 @@
         </p:nvSpPr>
         <p:spPr>
           <a:xfrm>
-            <a:off x="8138160" y="1737360"/>
-            <a:ext cx="3383280" cy="2560320"/>
+            <a:off x="640080" y="4645152"/>
+            <a:ext cx="8046720" cy="1618488"/>
           </a:xfrm>
           <a:prstGeom prst="rect">
             <a:avLst/>
@@ -4951,15 +4848,15 @@
           <a:p>
             <a:pPr algn="l" indent="0" marL="0">
               <a:lnSpc>
-                <a:spcPts val="2400"/>
+                <a:spcPts val="3000"/>
               </a:lnSpc>
               <a:spcAft>
-                <a:spcPts val="2160"/>
+                <a:spcPts val="1010"/>
               </a:spcAft>
               <a:buNone/>
             </a:pPr>
             <a:r>
-              <a:rPr lang="en-US" sz="2000" dirty="0">
+              <a:rPr lang="en-US" sz="2500" dirty="0">
                 <a:solidFill>
                   <a:srgbClr val="111111"/>
                 </a:solidFill>
@@ -4969,20 +4866,20 @@
               </a:rPr>
               <a:t>Predict whether the model's average miss will be smaller than the baseline's, and by roughly how much.</a:t>
             </a:r>
-            <a:endParaRPr lang="en-US" sz="2000" dirty="0"/>
-          </a:p>
-          <a:p>
-            <a:pPr algn="l" indent="0" marL="0">
-              <a:lnSpc>
-                <a:spcPts val="2400"/>
+            <a:endParaRPr lang="en-US" sz="2500" dirty="0"/>
+          </a:p>
+          <a:p>
+            <a:pPr algn="l" indent="0" marL="0">
+              <a:lnSpc>
+                <a:spcPts val="3000"/>
               </a:lnSpc>
               <a:spcAft>
-                <a:spcPts val="2160"/>
+                <a:spcPts val="1010"/>
               </a:spcAft>
               <a:buNone/>
             </a:pPr>
             <a:r>
-              <a:rPr lang="en-US" sz="2000" dirty="0">
+              <a:rPr lang="en-US" sz="2500" dirty="0">
                 <a:solidFill>
                   <a:srgbClr val="111111"/>
                 </a:solidFill>
@@ -4992,13 +4889,13 @@
               </a:rPr>
               <a:t>Write your guess on paper before we run it.</a:t>
             </a:r>
-            <a:endParaRPr lang="en-US" sz="2000" dirty="0"/>
+            <a:endParaRPr lang="en-US" sz="2500" dirty="0"/>
           </a:p>
         </p:txBody>
       </p:sp>
       <p:pic>
         <p:nvPicPr>
-          <p:cNvPr id="6" name="Image 0" descr="A page and a pen: write your guess first">    </p:cNvPr>
+          <p:cNvPr id="6" name="Image 0" descr="A page and a pen">    </p:cNvPr>
           <p:cNvPicPr>
             <a:picLocks noChangeAspect="1"/>
           </p:cNvPicPr>
@@ -5012,8 +4909,8 @@
         </p:blipFill>
         <p:spPr>
           <a:xfrm>
-            <a:off x="9013371" y="4343400"/>
-            <a:ext cx="2090057" cy="1828800"/>
+            <a:off x="10241280" y="5031486"/>
+            <a:ext cx="1188720" cy="1046988"/>
           </a:xfrm>
           <a:prstGeom prst="rect">
             <a:avLst/>
@@ -6182,15 +6079,15 @@
           <a:p>
             <a:pPr algn="l" indent="0" marL="0">
               <a:lnSpc>
-                <a:spcPts val="3480"/>
+                <a:spcPts val="3240"/>
               </a:lnSpc>
               <a:spcAft>
-                <a:spcPts val="2520"/>
+                <a:spcPts val="2020"/>
               </a:spcAft>
               <a:buNone/>
             </a:pPr>
             <a:r>
-              <a:rPr lang="en-US" sz="2900" dirty="0">
+              <a:rPr lang="en-US" sz="2700" dirty="0">
                 <a:solidFill>
                   <a:srgbClr val="111111"/>
                 </a:solidFill>
@@ -6198,22 +6095,22 @@
                 <a:ea typeface="Lato" pitchFamily="34" charset="-122"/>
                 <a:cs typeface="Lato" pitchFamily="34" charset="-120"/>
               </a:rPr>
-              <a:t>Run the experiment, record the two errors, and say whether the model beats the baseline on the held-out homes. Keep the split as it is. Do not keep changing random_state to get a better score.</a:t>
-            </a:r>
-            <a:endParaRPr lang="en-US" sz="2900" dirty="0"/>
-          </a:p>
-          <a:p>
-            <a:pPr algn="l" indent="0" marL="0">
-              <a:lnSpc>
-                <a:spcPts val="3480"/>
+              <a:t>Run the experiment, record the two errors, and say whether the model beats the baseline on the held-out homes.</a:t>
+            </a:r>
+            <a:endParaRPr lang="en-US" sz="2700" dirty="0"/>
+          </a:p>
+          <a:p>
+            <a:pPr algn="l" indent="0" marL="0">
+              <a:lnSpc>
+                <a:spcPts val="3240"/>
               </a:lnSpc>
               <a:spcAft>
-                <a:spcPts val="2520"/>
+                <a:spcPts val="2020"/>
               </a:spcAft>
               <a:buNone/>
             </a:pPr>
             <a:r>
-              <a:rPr lang="en-US" sz="2900" dirty="0">
+              <a:rPr lang="en-US" sz="2700" dirty="0">
                 <a:solidFill>
                   <a:srgbClr val="111111"/>
                 </a:solidFill>
@@ -6221,9 +6118,55 @@
                 <a:ea typeface="Lato" pitchFamily="34" charset="-122"/>
                 <a:cs typeface="Lato" pitchFamily="34" charset="-120"/>
               </a:rPr>
+              <a:t>Keep the split as it is.</a:t>
+            </a:r>
+            <a:endParaRPr lang="en-US" sz="2700" dirty="0"/>
+          </a:p>
+          <a:p>
+            <a:pPr algn="l" indent="0" marL="0">
+              <a:lnSpc>
+                <a:spcPts val="3240"/>
+              </a:lnSpc>
+              <a:spcAft>
+                <a:spcPts val="2020"/>
+              </a:spcAft>
+              <a:buNone/>
+            </a:pPr>
+            <a:r>
+              <a:rPr lang="en-US" sz="2700" dirty="0">
+                <a:solidFill>
+                  <a:srgbClr val="111111"/>
+                </a:solidFill>
+                <a:latin typeface="Lato" pitchFamily="34" charset="0"/>
+                <a:ea typeface="Lato" pitchFamily="34" charset="-122"/>
+                <a:cs typeface="Lato" pitchFamily="34" charset="-120"/>
+              </a:rPr>
+              <a:t>Do not keep changing random_state to get a better score.</a:t>
+            </a:r>
+            <a:endParaRPr lang="en-US" sz="2700" dirty="0"/>
+          </a:p>
+          <a:p>
+            <a:pPr algn="l" indent="0" marL="0">
+              <a:lnSpc>
+                <a:spcPts val="3240"/>
+              </a:lnSpc>
+              <a:spcAft>
+                <a:spcPts val="2020"/>
+              </a:spcAft>
+              <a:buNone/>
+            </a:pPr>
+            <a:r>
+              <a:rPr lang="en-US" sz="2700" dirty="0">
+                <a:solidFill>
+                  <a:srgbClr val="111111"/>
+                </a:solidFill>
+                <a:latin typeface="Lato" pitchFamily="34" charset="0"/>
+                <a:ea typeface="Lato" pitchFamily="34" charset="-122"/>
+                <a:cs typeface="Lato" pitchFamily="34" charset="-120"/>
+              </a:rPr>
               <a:t>Save it as ML15. Write two sentences: what you changed and how you checked it.</a:t>
             </a:r>
-            <a:endParaRPr lang="en-US" sz="2900" dirty="0"/>
+            <a:endParaRPr lang="en-US" sz="2700" dirty="0"/>
           </a:p>
         </p:txBody>
       </p:sp>
